--- a/website/public/generated/Nasr-city-Tunnel/05_samco_pco_31_slide_report.pptx
+++ b/website/public/generated/Nasr-city-Tunnel/05_samco_pco_31_slide_report.pptx
@@ -3191,7 +3191,7 @@
               </a:defRPr>
             </a:pPr>
             <a:r>
-              <a:t>Nasr city-Tunnel | 30 data-driven control sections | 2026-08-13T19:10:48+00:00</a:t>
+              <a:t>Nasr city-Tunnel | 30 data-driven control sections | 2026-08-14T03:05:38+00:00</a:t>
             </a:r>
           </a:p>
         </p:txBody>

--- a/website/public/generated/Nasr-city-Tunnel/05_samco_pco_31_slide_report.pptx
+++ b/website/public/generated/Nasr-city-Tunnel/05_samco_pco_31_slide_report.pptx
@@ -3191,7 +3191,7 @@
               </a:defRPr>
             </a:pPr>
             <a:r>
-              <a:t>Nasr city-Tunnel | 30 data-driven control sections | 2026-08-14T03:05:38+00:00</a:t>
+              <a:t>Nasr city-Tunnel | 30 data-driven control sections | 2026-08-15T05:31:06+00:00</a:t>
             </a:r>
           </a:p>
         </p:txBody>
@@ -3369,7 +3369,7 @@
               </a:defRPr>
             </a:pPr>
             <a:r>
-              <a:t>evm: 01-data/import_templates/evm.csv (17 rows)</a:t>
+              <a:t>evm: 01-data/import_templates/project_input_bundle.csv (17 rows)</a:t>
             </a:r>
           </a:p>
         </p:txBody>
@@ -4821,7 +4821,7 @@
               </a:defRPr>
             </a:pPr>
             <a:r>
-              <a:t>evm: 01-data/import_templates/evm.csv (17 rows)</a:t>
+              <a:t>evm: 01-data/import_templates/project_input_bundle.csv (17 rows)</a:t>
             </a:r>
           </a:p>
         </p:txBody>
@@ -9005,7 +9005,7 @@
               </a:defRPr>
             </a:pPr>
             <a:r>
-              <a:t>activities: 01-data/import_templates/activities.csv (17 rows)</a:t>
+              <a:t>activities: 01-data/import_templates/project_input_bundle.csv (17 rows)</a:t>
             </a:r>
           </a:p>
         </p:txBody>
@@ -10451,7 +10451,7 @@
               </a:defRPr>
             </a:pPr>
             <a:r>
-              <a:t>activities: 01-data/import_templates/activities.csv (17 rows)</a:t>
+              <a:t>activities: 01-data/import_templates/project_input_bundle.csv (17 rows)</a:t>
             </a:r>
           </a:p>
         </p:txBody>
@@ -11897,7 +11897,7 @@
               </a:defRPr>
             </a:pPr>
             <a:r>
-              <a:t>activities: 01-data/import_templates/activities.csv (17 rows)</a:t>
+              <a:t>activities: 01-data/import_templates/project_input_bundle.csv (17 rows)</a:t>
             </a:r>
           </a:p>
         </p:txBody>
@@ -13355,7 +13355,7 @@
               </a:defRPr>
             </a:pPr>
             <a:r>
-              <a:t>activities: 01-data/import_templates/activities.csv (17 rows)</a:t>
+              <a:t>activities: 01-data/import_templates/project_input_bundle.csv (17 rows)</a:t>
             </a:r>
           </a:p>
         </p:txBody>
@@ -14813,7 +14813,7 @@
               </a:defRPr>
             </a:pPr>
             <a:r>
-              <a:t>activities: 01-data/import_templates/activities.csv (17 rows)</a:t>
+              <a:t>activities: 01-data/import_templates/project_input_bundle.csv (17 rows)</a:t>
             </a:r>
           </a:p>
         </p:txBody>
@@ -19035,7 +19035,7 @@
               </a:defRPr>
             </a:pPr>
             <a:r>
-              <a:t>activities: 01-data/import_templates/activities.csv (17 rows)</a:t>
+              <a:t>activities: 01-data/import_templates/project_input_bundle.csv (17 rows)</a:t>
             </a:r>
           </a:p>
           <a:p>
@@ -19047,7 +19047,7 @@
               </a:defRPr>
             </a:pPr>
             <a:r>
-              <a:t>progress: 01-data/import_templates/progress_updates.csv (17 rows)</a:t>
+              <a:t>progress: 01-data/import_templates/project_input_bundle.csv (17 rows)</a:t>
             </a:r>
           </a:p>
         </p:txBody>
@@ -20505,7 +20505,7 @@
               </a:defRPr>
             </a:pPr>
             <a:r>
-              <a:t>activities: 01-data/import_templates/activities.csv (17 rows)</a:t>
+              <a:t>activities: 01-data/import_templates/project_input_bundle.csv (17 rows)</a:t>
             </a:r>
           </a:p>
           <a:p>
@@ -20517,7 +20517,7 @@
               </a:defRPr>
             </a:pPr>
             <a:r>
-              <a:t>evm: 01-data/import_templates/evm.csv (17 rows)</a:t>
+              <a:t>evm: 01-data/import_templates/project_input_bundle.csv (17 rows)</a:t>
             </a:r>
           </a:p>
           <a:p>
@@ -20981,7 +20981,7 @@
               </a:defRPr>
             </a:pPr>
             <a:r>
-              <a:t>activities: 01-data/import_templates/activities.csv (17 rows)</a:t>
+              <a:t>activities: 01-data/import_templates/project_input_bundle.csv (17 rows)</a:t>
             </a:r>
           </a:p>
         </p:txBody>
@@ -22427,7 +22427,7 @@
               </a:defRPr>
             </a:pPr>
             <a:r>
-              <a:t>activities: 01-data/import_templates/activities.csv (17 rows)</a:t>
+              <a:t>activities: 01-data/import_templates/project_input_bundle.csv (17 rows)</a:t>
             </a:r>
           </a:p>
           <a:p>
@@ -22439,7 +22439,7 @@
               </a:defRPr>
             </a:pPr>
             <a:r>
-              <a:t>evm: 01-data/import_templates/evm.csv (17 rows)</a:t>
+              <a:t>evm: 01-data/import_templates/project_input_bundle.csv (17 rows)</a:t>
             </a:r>
           </a:p>
         </p:txBody>
@@ -23885,7 +23885,7 @@
               </a:defRPr>
             </a:pPr>
             <a:r>
-              <a:t>activities: 01-data/import_templates/activities.csv (17 rows)</a:t>
+              <a:t>activities: 01-data/import_templates/project_input_bundle.csv (17 rows)</a:t>
             </a:r>
           </a:p>
           <a:p>
@@ -23897,7 +23897,7 @@
               </a:defRPr>
             </a:pPr>
             <a:r>
-              <a:t>evm: 01-data/import_templates/evm.csv (17 rows)</a:t>
+              <a:t>evm: 01-data/import_templates/project_input_bundle.csv (17 rows)</a:t>
             </a:r>
           </a:p>
           <a:p>
@@ -27677,7 +27677,7 @@
               </a:defRPr>
             </a:pPr>
             <a:r>
-              <a:t>activities: 01-data/import_templates/activities.csv (17 rows)</a:t>
+              <a:t>activities: 01-data/import_templates/project_input_bundle.csv (17 rows)</a:t>
             </a:r>
           </a:p>
           <a:p>
@@ -27689,7 +27689,7 @@
               </a:defRPr>
             </a:pPr>
             <a:r>
-              <a:t>progress: 01-data/import_templates/progress_updates.csv (17 rows)</a:t>
+              <a:t>progress: 01-data/import_templates/project_input_bundle.csv (17 rows)</a:t>
             </a:r>
           </a:p>
         </p:txBody>
@@ -29147,7 +29147,7 @@
               </a:defRPr>
             </a:pPr>
             <a:r>
-              <a:t>activities: 01-data/import_templates/activities.csv (17 rows)</a:t>
+              <a:t>activities: 01-data/import_templates/project_input_bundle.csv (17 rows)</a:t>
             </a:r>
           </a:p>
         </p:txBody>
@@ -31479,7 +31479,7 @@
               </a:defRPr>
             </a:pPr>
             <a:r>
-              <a:t>activities: 01-data/import_templates/activities.csv (17 rows)</a:t>
+              <a:t>activities: 01-data/import_templates/project_input_bundle.csv (17 rows)</a:t>
             </a:r>
           </a:p>
         </p:txBody>
